--- a/docs/pptx/whole/jx-scatter-cg-epi-age80.pptx
+++ b/docs/pptx/whole/jx-scatter-cg-epi-age80.pptx
@@ -36084,7 +36084,2067 @@
         </p:sp>
         <p:sp>
           <p:nvSpPr>
-            <p:cNvPr id="966" name="tx966"/>
+            <p:cNvPr id="966" name="pg966"/>
+            <p:cNvSpPr/>
+            <p:nvPr/>
+          </p:nvSpPr>
+          <p:spPr>
+            <a:xfrm>
+              <a:off x="1985667" y="2814404"/>
+              <a:ext cx="6631543" cy="1943601"/>
+            </a:xfrm>
+            <a:custGeom>
+              <a:avLst/>
+              <a:pathLst>
+                <a:path w="6631543" h="1943601">
+                  <a:moveTo>
+                    <a:pt x="0" y="1863315"/>
+                  </a:moveTo>
+                  <a:lnTo>
+                    <a:pt x="162925" y="1820128"/>
+                  </a:lnTo>
+                  <a:lnTo>
+                    <a:pt x="325851" y="1776911"/>
+                  </a:lnTo>
+                  <a:lnTo>
+                    <a:pt x="488776" y="1733659"/>
+                  </a:lnTo>
+                  <a:lnTo>
+                    <a:pt x="651702" y="1690366"/>
+                  </a:lnTo>
+                  <a:lnTo>
+                    <a:pt x="814628" y="1647023"/>
+                  </a:lnTo>
+                  <a:lnTo>
+                    <a:pt x="977553" y="1603619"/>
+                  </a:lnTo>
+                  <a:lnTo>
+                    <a:pt x="1140479" y="1560142"/>
+                  </a:lnTo>
+                  <a:lnTo>
+                    <a:pt x="1303404" y="1516577"/>
+                  </a:lnTo>
+                  <a:lnTo>
+                    <a:pt x="1466330" y="1472904"/>
+                  </a:lnTo>
+                  <a:lnTo>
+                    <a:pt x="1629256" y="1429098"/>
+                  </a:lnTo>
+                  <a:lnTo>
+                    <a:pt x="1792181" y="1385132"/>
+                  </a:lnTo>
+                  <a:lnTo>
+                    <a:pt x="1955107" y="1340973"/>
+                  </a:lnTo>
+                  <a:lnTo>
+                    <a:pt x="2118033" y="1296585"/>
+                  </a:lnTo>
+                  <a:lnTo>
+                    <a:pt x="2280958" y="1251936"/>
+                  </a:lnTo>
+                  <a:lnTo>
+                    <a:pt x="2443884" y="1206996"/>
+                  </a:lnTo>
+                  <a:lnTo>
+                    <a:pt x="2606809" y="1161750"/>
+                  </a:lnTo>
+                  <a:lnTo>
+                    <a:pt x="2769735" y="1116197"/>
+                  </a:lnTo>
+                  <a:lnTo>
+                    <a:pt x="2932661" y="1070350"/>
+                  </a:lnTo>
+                  <a:lnTo>
+                    <a:pt x="3095586" y="1024237"/>
+                  </a:lnTo>
+                  <a:lnTo>
+                    <a:pt x="3258512" y="977891"/>
+                  </a:lnTo>
+                  <a:lnTo>
+                    <a:pt x="3421438" y="931347"/>
+                  </a:lnTo>
+                  <a:lnTo>
+                    <a:pt x="3584363" y="884638"/>
+                  </a:lnTo>
+                  <a:lnTo>
+                    <a:pt x="3747289" y="837793"/>
+                  </a:lnTo>
+                  <a:lnTo>
+                    <a:pt x="3910214" y="790837"/>
+                  </a:lnTo>
+                  <a:lnTo>
+                    <a:pt x="4073140" y="743789"/>
+                  </a:lnTo>
+                  <a:lnTo>
+                    <a:pt x="4236066" y="696667"/>
+                  </a:lnTo>
+                  <a:lnTo>
+                    <a:pt x="4398991" y="649483"/>
+                  </a:lnTo>
+                  <a:lnTo>
+                    <a:pt x="4561917" y="602247"/>
+                  </a:lnTo>
+                  <a:lnTo>
+                    <a:pt x="4724843" y="554969"/>
+                  </a:lnTo>
+                  <a:lnTo>
+                    <a:pt x="4887768" y="507655"/>
+                  </a:lnTo>
+                  <a:lnTo>
+                    <a:pt x="5050694" y="460311"/>
+                  </a:lnTo>
+                  <a:lnTo>
+                    <a:pt x="5213619" y="412940"/>
+                  </a:lnTo>
+                  <a:lnTo>
+                    <a:pt x="5376545" y="365548"/>
+                  </a:lnTo>
+                  <a:lnTo>
+                    <a:pt x="5539471" y="318136"/>
+                  </a:lnTo>
+                  <a:lnTo>
+                    <a:pt x="5702396" y="270708"/>
+                  </a:lnTo>
+                  <a:lnTo>
+                    <a:pt x="5865322" y="223265"/>
+                  </a:lnTo>
+                  <a:lnTo>
+                    <a:pt x="6028248" y="175810"/>
+                  </a:lnTo>
+                  <a:lnTo>
+                    <a:pt x="6191173" y="128343"/>
+                  </a:lnTo>
+                  <a:lnTo>
+                    <a:pt x="6354099" y="80867"/>
+                  </a:lnTo>
+                  <a:lnTo>
+                    <a:pt x="6517024" y="33382"/>
+                  </a:lnTo>
+                  <a:lnTo>
+                    <a:pt x="6631543" y="0"/>
+                  </a:lnTo>
+                  <a:lnTo>
+                    <a:pt x="6631543" y="121866"/>
+                  </a:lnTo>
+                  <a:lnTo>
+                    <a:pt x="6517024" y="152120"/>
+                  </a:lnTo>
+                  <a:lnTo>
+                    <a:pt x="6354099" y="195170"/>
+                  </a:lnTo>
+                  <a:lnTo>
+                    <a:pt x="6191173" y="238229"/>
+                  </a:lnTo>
+                  <a:lnTo>
+                    <a:pt x="6028248" y="281298"/>
+                  </a:lnTo>
+                  <a:lnTo>
+                    <a:pt x="5865322" y="324378"/>
+                  </a:lnTo>
+                  <a:lnTo>
+                    <a:pt x="5702396" y="367470"/>
+                  </a:lnTo>
+                  <a:lnTo>
+                    <a:pt x="5539471" y="410578"/>
+                  </a:lnTo>
+                  <a:lnTo>
+                    <a:pt x="5376545" y="453701"/>
+                  </a:lnTo>
+                  <a:lnTo>
+                    <a:pt x="5213619" y="496844"/>
+                  </a:lnTo>
+                  <a:lnTo>
+                    <a:pt x="5050694" y="540009"/>
+                  </a:lnTo>
+                  <a:lnTo>
+                    <a:pt x="4887768" y="583200"/>
+                  </a:lnTo>
+                  <a:lnTo>
+                    <a:pt x="4724843" y="626421"/>
+                  </a:lnTo>
+                  <a:lnTo>
+                    <a:pt x="4561917" y="669678"/>
+                  </a:lnTo>
+                  <a:lnTo>
+                    <a:pt x="4398991" y="712978"/>
+                  </a:lnTo>
+                  <a:lnTo>
+                    <a:pt x="4236066" y="756330"/>
+                  </a:lnTo>
+                  <a:lnTo>
+                    <a:pt x="4073140" y="799743"/>
+                  </a:lnTo>
+                  <a:lnTo>
+                    <a:pt x="3910214" y="843231"/>
+                  </a:lnTo>
+                  <a:lnTo>
+                    <a:pt x="3747289" y="886810"/>
+                  </a:lnTo>
+                  <a:lnTo>
+                    <a:pt x="3584363" y="930500"/>
+                  </a:lnTo>
+                  <a:lnTo>
+                    <a:pt x="3421438" y="974326"/>
+                  </a:lnTo>
+                  <a:lnTo>
+                    <a:pt x="3258512" y="1018318"/>
+                  </a:lnTo>
+                  <a:lnTo>
+                    <a:pt x="3095586" y="1062507"/>
+                  </a:lnTo>
+                  <a:lnTo>
+                    <a:pt x="2932661" y="1106929"/>
+                  </a:lnTo>
+                  <a:lnTo>
+                    <a:pt x="2769735" y="1151618"/>
+                  </a:lnTo>
+                  <a:lnTo>
+                    <a:pt x="2606809" y="1196600"/>
+                  </a:lnTo>
+                  <a:lnTo>
+                    <a:pt x="2443884" y="1241890"/>
+                  </a:lnTo>
+                  <a:lnTo>
+                    <a:pt x="2280958" y="1287486"/>
+                  </a:lnTo>
+                  <a:lnTo>
+                    <a:pt x="2118033" y="1333371"/>
+                  </a:lnTo>
+                  <a:lnTo>
+                    <a:pt x="1955107" y="1379519"/>
+                  </a:lnTo>
+                  <a:lnTo>
+                    <a:pt x="1792181" y="1425895"/>
+                  </a:lnTo>
+                  <a:lnTo>
+                    <a:pt x="1629256" y="1472464"/>
+                  </a:lnTo>
+                  <a:lnTo>
+                    <a:pt x="1466330" y="1519194"/>
+                  </a:lnTo>
+                  <a:lnTo>
+                    <a:pt x="1303404" y="1566056"/>
+                  </a:lnTo>
+                  <a:lnTo>
+                    <a:pt x="1140479" y="1613026"/>
+                  </a:lnTo>
+                  <a:lnTo>
+                    <a:pt x="977553" y="1660085"/>
+                  </a:lnTo>
+                  <a:lnTo>
+                    <a:pt x="814628" y="1707217"/>
+                  </a:lnTo>
+                  <a:lnTo>
+                    <a:pt x="651702" y="1754409"/>
+                  </a:lnTo>
+                  <a:lnTo>
+                    <a:pt x="488776" y="1801651"/>
+                  </a:lnTo>
+                  <a:lnTo>
+                    <a:pt x="325851" y="1848934"/>
+                  </a:lnTo>
+                  <a:lnTo>
+                    <a:pt x="162925" y="1896253"/>
+                  </a:lnTo>
+                  <a:lnTo>
+                    <a:pt x="0" y="1943601"/>
+                  </a:lnTo>
+                  <a:close/>
+                </a:path>
+              </a:pathLst>
+            </a:custGeom>
+            <a:solidFill>
+              <a:srgbClr val="999999">
+                <a:alpha val="14901"/>
+              </a:srgbClr>
+            </a:solidFill>
+          </p:spPr>
+          <p:txBody>
+            <a:bodyPr/>
+            <a:lstStyle/>
+            <a:p/>
+          </p:txBody>
+        </p:sp>
+        <p:sp>
+          <p:nvSpPr>
+            <p:cNvPr id="967" name="pl967"/>
+            <p:cNvSpPr/>
+            <p:nvPr/>
+          </p:nvSpPr>
+          <p:spPr>
+            <a:xfrm>
+              <a:off x="1985667" y="2814404"/>
+              <a:ext cx="6631543" cy="1863315"/>
+            </a:xfrm>
+            <a:custGeom>
+              <a:avLst/>
+              <a:pathLst>
+                <a:path w="6631543" h="1863315">
+                  <a:moveTo>
+                    <a:pt x="0" y="1863315"/>
+                  </a:moveTo>
+                  <a:lnTo>
+                    <a:pt x="162925" y="1820128"/>
+                  </a:lnTo>
+                  <a:lnTo>
+                    <a:pt x="325851" y="1776911"/>
+                  </a:lnTo>
+                  <a:lnTo>
+                    <a:pt x="488776" y="1733659"/>
+                  </a:lnTo>
+                  <a:lnTo>
+                    <a:pt x="651702" y="1690366"/>
+                  </a:lnTo>
+                  <a:lnTo>
+                    <a:pt x="814628" y="1647023"/>
+                  </a:lnTo>
+                  <a:lnTo>
+                    <a:pt x="977553" y="1603619"/>
+                  </a:lnTo>
+                  <a:lnTo>
+                    <a:pt x="1140479" y="1560142"/>
+                  </a:lnTo>
+                  <a:lnTo>
+                    <a:pt x="1303404" y="1516577"/>
+                  </a:lnTo>
+                  <a:lnTo>
+                    <a:pt x="1466330" y="1472904"/>
+                  </a:lnTo>
+                  <a:lnTo>
+                    <a:pt x="1629256" y="1429098"/>
+                  </a:lnTo>
+                  <a:lnTo>
+                    <a:pt x="1792181" y="1385132"/>
+                  </a:lnTo>
+                  <a:lnTo>
+                    <a:pt x="1955107" y="1340973"/>
+                  </a:lnTo>
+                  <a:lnTo>
+                    <a:pt x="2118033" y="1296585"/>
+                  </a:lnTo>
+                  <a:lnTo>
+                    <a:pt x="2280958" y="1251936"/>
+                  </a:lnTo>
+                  <a:lnTo>
+                    <a:pt x="2443884" y="1206996"/>
+                  </a:lnTo>
+                  <a:lnTo>
+                    <a:pt x="2606809" y="1161750"/>
+                  </a:lnTo>
+                  <a:lnTo>
+                    <a:pt x="2769735" y="1116197"/>
+                  </a:lnTo>
+                  <a:lnTo>
+                    <a:pt x="2932661" y="1070350"/>
+                  </a:lnTo>
+                  <a:lnTo>
+                    <a:pt x="3095586" y="1024237"/>
+                  </a:lnTo>
+                  <a:lnTo>
+                    <a:pt x="3258512" y="977891"/>
+                  </a:lnTo>
+                  <a:lnTo>
+                    <a:pt x="3421438" y="931347"/>
+                  </a:lnTo>
+                  <a:lnTo>
+                    <a:pt x="3584363" y="884638"/>
+                  </a:lnTo>
+                  <a:lnTo>
+                    <a:pt x="3747289" y="837793"/>
+                  </a:lnTo>
+                  <a:lnTo>
+                    <a:pt x="3910214" y="790837"/>
+                  </a:lnTo>
+                  <a:lnTo>
+                    <a:pt x="4073140" y="743789"/>
+                  </a:lnTo>
+                  <a:lnTo>
+                    <a:pt x="4236066" y="696667"/>
+                  </a:lnTo>
+                  <a:lnTo>
+                    <a:pt x="4398991" y="649483"/>
+                  </a:lnTo>
+                  <a:lnTo>
+                    <a:pt x="4561917" y="602247"/>
+                  </a:lnTo>
+                  <a:lnTo>
+                    <a:pt x="4724843" y="554969"/>
+                  </a:lnTo>
+                  <a:lnTo>
+                    <a:pt x="4887768" y="507655"/>
+                  </a:lnTo>
+                  <a:lnTo>
+                    <a:pt x="5050694" y="460311"/>
+                  </a:lnTo>
+                  <a:lnTo>
+                    <a:pt x="5213619" y="412940"/>
+                  </a:lnTo>
+                  <a:lnTo>
+                    <a:pt x="5376545" y="365548"/>
+                  </a:lnTo>
+                  <a:lnTo>
+                    <a:pt x="5539471" y="318136"/>
+                  </a:lnTo>
+                  <a:lnTo>
+                    <a:pt x="5702396" y="270708"/>
+                  </a:lnTo>
+                  <a:lnTo>
+                    <a:pt x="5865322" y="223265"/>
+                  </a:lnTo>
+                  <a:lnTo>
+                    <a:pt x="6028248" y="175810"/>
+                  </a:lnTo>
+                  <a:lnTo>
+                    <a:pt x="6191173" y="128343"/>
+                  </a:lnTo>
+                  <a:lnTo>
+                    <a:pt x="6354099" y="80867"/>
+                  </a:lnTo>
+                  <a:lnTo>
+                    <a:pt x="6517024" y="33382"/>
+                  </a:lnTo>
+                  <a:lnTo>
+                    <a:pt x="6631543" y="0"/>
+                  </a:lnTo>
+                </a:path>
+              </a:pathLst>
+            </a:custGeom>
+          </p:spPr>
+          <p:txBody>
+            <a:bodyPr/>
+            <a:lstStyle/>
+            <a:p/>
+          </p:txBody>
+        </p:sp>
+        <p:sp>
+          <p:nvSpPr>
+            <p:cNvPr id="968" name="pl968"/>
+            <p:cNvSpPr/>
+            <p:nvPr/>
+          </p:nvSpPr>
+          <p:spPr>
+            <a:xfrm>
+              <a:off x="1985667" y="2936270"/>
+              <a:ext cx="6631543" cy="1821735"/>
+            </a:xfrm>
+            <a:custGeom>
+              <a:avLst/>
+              <a:pathLst>
+                <a:path w="6631543" h="1821735">
+                  <a:moveTo>
+                    <a:pt x="6631543" y="0"/>
+                  </a:moveTo>
+                  <a:lnTo>
+                    <a:pt x="6517024" y="30254"/>
+                  </a:lnTo>
+                  <a:lnTo>
+                    <a:pt x="6354099" y="73304"/>
+                  </a:lnTo>
+                  <a:lnTo>
+                    <a:pt x="6191173" y="116363"/>
+                  </a:lnTo>
+                  <a:lnTo>
+                    <a:pt x="6028248" y="159432"/>
+                  </a:lnTo>
+                  <a:lnTo>
+                    <a:pt x="5865322" y="202512"/>
+                  </a:lnTo>
+                  <a:lnTo>
+                    <a:pt x="5702396" y="245604"/>
+                  </a:lnTo>
+                  <a:lnTo>
+                    <a:pt x="5539471" y="288711"/>
+                  </a:lnTo>
+                  <a:lnTo>
+                    <a:pt x="5376545" y="331835"/>
+                  </a:lnTo>
+                  <a:lnTo>
+                    <a:pt x="5213619" y="374978"/>
+                  </a:lnTo>
+                  <a:lnTo>
+                    <a:pt x="5050694" y="418143"/>
+                  </a:lnTo>
+                  <a:lnTo>
+                    <a:pt x="4887768" y="461334"/>
+                  </a:lnTo>
+                  <a:lnTo>
+                    <a:pt x="4724843" y="504555"/>
+                  </a:lnTo>
+                  <a:lnTo>
+                    <a:pt x="4561917" y="547812"/>
+                  </a:lnTo>
+                  <a:lnTo>
+                    <a:pt x="4398991" y="591112"/>
+                  </a:lnTo>
+                  <a:lnTo>
+                    <a:pt x="4236066" y="634464"/>
+                  </a:lnTo>
+                  <a:lnTo>
+                    <a:pt x="4073140" y="677877"/>
+                  </a:lnTo>
+                  <a:lnTo>
+                    <a:pt x="3910214" y="721364"/>
+                  </a:lnTo>
+                  <a:lnTo>
+                    <a:pt x="3747289" y="764944"/>
+                  </a:lnTo>
+                  <a:lnTo>
+                    <a:pt x="3584363" y="808634"/>
+                  </a:lnTo>
+                  <a:lnTo>
+                    <a:pt x="3421438" y="852460"/>
+                  </a:lnTo>
+                  <a:lnTo>
+                    <a:pt x="3258512" y="896452"/>
+                  </a:lnTo>
+                  <a:lnTo>
+                    <a:pt x="3095586" y="940641"/>
+                  </a:lnTo>
+                  <a:lnTo>
+                    <a:pt x="2932661" y="985063"/>
+                  </a:lnTo>
+                  <a:lnTo>
+                    <a:pt x="2769735" y="1029752"/>
+                  </a:lnTo>
+                  <a:lnTo>
+                    <a:pt x="2606809" y="1074734"/>
+                  </a:lnTo>
+                  <a:lnTo>
+                    <a:pt x="2443884" y="1120024"/>
+                  </a:lnTo>
+                  <a:lnTo>
+                    <a:pt x="2280958" y="1165619"/>
+                  </a:lnTo>
+                  <a:lnTo>
+                    <a:pt x="2118033" y="1211505"/>
+                  </a:lnTo>
+                  <a:lnTo>
+                    <a:pt x="1955107" y="1257653"/>
+                  </a:lnTo>
+                  <a:lnTo>
+                    <a:pt x="1792181" y="1304029"/>
+                  </a:lnTo>
+                  <a:lnTo>
+                    <a:pt x="1629256" y="1350598"/>
+                  </a:lnTo>
+                  <a:lnTo>
+                    <a:pt x="1466330" y="1397328"/>
+                  </a:lnTo>
+                  <a:lnTo>
+                    <a:pt x="1303404" y="1444190"/>
+                  </a:lnTo>
+                  <a:lnTo>
+                    <a:pt x="1140479" y="1491160"/>
+                  </a:lnTo>
+                  <a:lnTo>
+                    <a:pt x="977553" y="1538219"/>
+                  </a:lnTo>
+                  <a:lnTo>
+                    <a:pt x="814628" y="1585351"/>
+                  </a:lnTo>
+                  <a:lnTo>
+                    <a:pt x="651702" y="1632543"/>
+                  </a:lnTo>
+                  <a:lnTo>
+                    <a:pt x="488776" y="1679784"/>
+                  </a:lnTo>
+                  <a:lnTo>
+                    <a:pt x="325851" y="1727068"/>
+                  </a:lnTo>
+                  <a:lnTo>
+                    <a:pt x="162925" y="1774387"/>
+                  </a:lnTo>
+                  <a:lnTo>
+                    <a:pt x="0" y="1821735"/>
+                  </a:lnTo>
+                </a:path>
+              </a:pathLst>
+            </a:custGeom>
+          </p:spPr>
+          <p:txBody>
+            <a:bodyPr/>
+            <a:lstStyle/>
+            <a:p/>
+          </p:txBody>
+        </p:sp>
+        <p:sp>
+          <p:nvSpPr>
+            <p:cNvPr id="969" name="pl969"/>
+            <p:cNvSpPr/>
+            <p:nvPr/>
+          </p:nvSpPr>
+          <p:spPr>
+            <a:xfrm>
+              <a:off x="1985667" y="2875337"/>
+              <a:ext cx="6631543" cy="1842525"/>
+            </a:xfrm>
+            <a:custGeom>
+              <a:avLst/>
+              <a:pathLst>
+                <a:path w="6631543" h="1842525">
+                  <a:moveTo>
+                    <a:pt x="0" y="1842525"/>
+                  </a:moveTo>
+                  <a:lnTo>
+                    <a:pt x="162925" y="1797257"/>
+                  </a:lnTo>
+                  <a:lnTo>
+                    <a:pt x="325851" y="1751990"/>
+                  </a:lnTo>
+                  <a:lnTo>
+                    <a:pt x="488776" y="1706722"/>
+                  </a:lnTo>
+                  <a:lnTo>
+                    <a:pt x="651702" y="1661454"/>
+                  </a:lnTo>
+                  <a:lnTo>
+                    <a:pt x="814628" y="1616187"/>
+                  </a:lnTo>
+                  <a:lnTo>
+                    <a:pt x="977553" y="1570919"/>
+                  </a:lnTo>
+                  <a:lnTo>
+                    <a:pt x="1140479" y="1525651"/>
+                  </a:lnTo>
+                  <a:lnTo>
+                    <a:pt x="1303404" y="1480384"/>
+                  </a:lnTo>
+                  <a:lnTo>
+                    <a:pt x="1466330" y="1435116"/>
+                  </a:lnTo>
+                  <a:lnTo>
+                    <a:pt x="1629256" y="1389848"/>
+                  </a:lnTo>
+                  <a:lnTo>
+                    <a:pt x="1792181" y="1344581"/>
+                  </a:lnTo>
+                  <a:lnTo>
+                    <a:pt x="1955107" y="1299313"/>
+                  </a:lnTo>
+                  <a:lnTo>
+                    <a:pt x="2118033" y="1254045"/>
+                  </a:lnTo>
+                  <a:lnTo>
+                    <a:pt x="2280958" y="1208777"/>
+                  </a:lnTo>
+                  <a:lnTo>
+                    <a:pt x="2443884" y="1163510"/>
+                  </a:lnTo>
+                  <a:lnTo>
+                    <a:pt x="2606809" y="1118242"/>
+                  </a:lnTo>
+                  <a:lnTo>
+                    <a:pt x="2769735" y="1072974"/>
+                  </a:lnTo>
+                  <a:lnTo>
+                    <a:pt x="2932661" y="1027707"/>
+                  </a:lnTo>
+                  <a:lnTo>
+                    <a:pt x="3095586" y="982439"/>
+                  </a:lnTo>
+                  <a:lnTo>
+                    <a:pt x="3258512" y="937171"/>
+                  </a:lnTo>
+                  <a:lnTo>
+                    <a:pt x="3421438" y="891904"/>
+                  </a:lnTo>
+                  <a:lnTo>
+                    <a:pt x="3584363" y="846636"/>
+                  </a:lnTo>
+                  <a:lnTo>
+                    <a:pt x="3747289" y="801368"/>
+                  </a:lnTo>
+                  <a:lnTo>
+                    <a:pt x="3910214" y="756101"/>
+                  </a:lnTo>
+                  <a:lnTo>
+                    <a:pt x="4073140" y="710833"/>
+                  </a:lnTo>
+                  <a:lnTo>
+                    <a:pt x="4236066" y="665565"/>
+                  </a:lnTo>
+                  <a:lnTo>
+                    <a:pt x="4398991" y="620298"/>
+                  </a:lnTo>
+                  <a:lnTo>
+                    <a:pt x="4561917" y="575030"/>
+                  </a:lnTo>
+                  <a:lnTo>
+                    <a:pt x="4724843" y="529762"/>
+                  </a:lnTo>
+                  <a:lnTo>
+                    <a:pt x="4887768" y="484495"/>
+                  </a:lnTo>
+                  <a:lnTo>
+                    <a:pt x="5050694" y="439227"/>
+                  </a:lnTo>
+                  <a:lnTo>
+                    <a:pt x="5213619" y="393959"/>
+                  </a:lnTo>
+                  <a:lnTo>
+                    <a:pt x="5376545" y="348691"/>
+                  </a:lnTo>
+                  <a:lnTo>
+                    <a:pt x="5539471" y="303424"/>
+                  </a:lnTo>
+                  <a:lnTo>
+                    <a:pt x="5702396" y="258156"/>
+                  </a:lnTo>
+                  <a:lnTo>
+                    <a:pt x="5865322" y="212888"/>
+                  </a:lnTo>
+                  <a:lnTo>
+                    <a:pt x="6028248" y="167621"/>
+                  </a:lnTo>
+                  <a:lnTo>
+                    <a:pt x="6191173" y="122353"/>
+                  </a:lnTo>
+                  <a:lnTo>
+                    <a:pt x="6354099" y="77085"/>
+                  </a:lnTo>
+                  <a:lnTo>
+                    <a:pt x="6517024" y="31818"/>
+                  </a:lnTo>
+                  <a:lnTo>
+                    <a:pt x="6631543" y="0"/>
+                  </a:lnTo>
+                </a:path>
+              </a:pathLst>
+            </a:custGeom>
+            <a:ln w="27101" cap="flat">
+              <a:solidFill>
+                <a:srgbClr val="999999">
+                  <a:alpha val="100000"/>
+                </a:srgbClr>
+              </a:solidFill>
+              <a:prstDash val="solid"/>
+              <a:round/>
+            </a:ln>
+          </p:spPr>
+          <p:txBody>
+            <a:bodyPr/>
+            <a:lstStyle/>
+            <a:p/>
+          </p:txBody>
+        </p:sp>
+        <p:sp>
+          <p:nvSpPr>
+            <p:cNvPr id="970" name="pg970"/>
+            <p:cNvSpPr/>
+            <p:nvPr/>
+          </p:nvSpPr>
+          <p:spPr>
+            <a:xfrm>
+              <a:off x="2333112" y="3218704"/>
+              <a:ext cx="3164944" cy="1732438"/>
+            </a:xfrm>
+            <a:custGeom>
+              <a:avLst/>
+              <a:pathLst>
+                <a:path w="3164944" h="1732438">
+                  <a:moveTo>
+                    <a:pt x="0" y="1515659"/>
+                  </a:moveTo>
+                  <a:lnTo>
+                    <a:pt x="40062" y="1501265"/>
+                  </a:lnTo>
+                  <a:lnTo>
+                    <a:pt x="80125" y="1486828"/>
+                  </a:lnTo>
+                  <a:lnTo>
+                    <a:pt x="120187" y="1472345"/>
+                  </a:lnTo>
+                  <a:lnTo>
+                    <a:pt x="160250" y="1457811"/>
+                  </a:lnTo>
+                  <a:lnTo>
+                    <a:pt x="200312" y="1443220"/>
+                  </a:lnTo>
+                  <a:lnTo>
+                    <a:pt x="240375" y="1428566"/>
+                  </a:lnTo>
+                  <a:lnTo>
+                    <a:pt x="280438" y="1413843"/>
+                  </a:lnTo>
+                  <a:lnTo>
+                    <a:pt x="320500" y="1399043"/>
+                  </a:lnTo>
+                  <a:lnTo>
+                    <a:pt x="360563" y="1384158"/>
+                  </a:lnTo>
+                  <a:lnTo>
+                    <a:pt x="400625" y="1369179"/>
+                  </a:lnTo>
+                  <a:lnTo>
+                    <a:pt x="440688" y="1354095"/>
+                  </a:lnTo>
+                  <a:lnTo>
+                    <a:pt x="480751" y="1338895"/>
+                  </a:lnTo>
+                  <a:lnTo>
+                    <a:pt x="520813" y="1323566"/>
+                  </a:lnTo>
+                  <a:lnTo>
+                    <a:pt x="560876" y="1308095"/>
+                  </a:lnTo>
+                  <a:lnTo>
+                    <a:pt x="600938" y="1292468"/>
+                  </a:lnTo>
+                  <a:lnTo>
+                    <a:pt x="641001" y="1276668"/>
+                  </a:lnTo>
+                  <a:lnTo>
+                    <a:pt x="681063" y="1260680"/>
+                  </a:lnTo>
+                  <a:lnTo>
+                    <a:pt x="721126" y="1244488"/>
+                  </a:lnTo>
+                  <a:lnTo>
+                    <a:pt x="761189" y="1228076"/>
+                  </a:lnTo>
+                  <a:lnTo>
+                    <a:pt x="801251" y="1211429"/>
+                  </a:lnTo>
+                  <a:lnTo>
+                    <a:pt x="841314" y="1194534"/>
+                  </a:lnTo>
+                  <a:lnTo>
+                    <a:pt x="881376" y="1177380"/>
+                  </a:lnTo>
+                  <a:lnTo>
+                    <a:pt x="921439" y="1159960"/>
+                  </a:lnTo>
+                  <a:lnTo>
+                    <a:pt x="961502" y="1142270"/>
+                  </a:lnTo>
+                  <a:lnTo>
+                    <a:pt x="1001564" y="1124308"/>
+                  </a:lnTo>
+                  <a:lnTo>
+                    <a:pt x="1041627" y="1106079"/>
+                  </a:lnTo>
+                  <a:lnTo>
+                    <a:pt x="1081689" y="1087589"/>
+                  </a:lnTo>
+                  <a:lnTo>
+                    <a:pt x="1121752" y="1068849"/>
+                  </a:lnTo>
+                  <a:lnTo>
+                    <a:pt x="1161814" y="1049872"/>
+                  </a:lnTo>
+                  <a:lnTo>
+                    <a:pt x="1201877" y="1030671"/>
+                  </a:lnTo>
+                  <a:lnTo>
+                    <a:pt x="1241940" y="1011263"/>
+                  </a:lnTo>
+                  <a:lnTo>
+                    <a:pt x="1282002" y="991663"/>
+                  </a:lnTo>
+                  <a:lnTo>
+                    <a:pt x="1322065" y="971888"/>
+                  </a:lnTo>
+                  <a:lnTo>
+                    <a:pt x="1362127" y="951954"/>
+                  </a:lnTo>
+                  <a:lnTo>
+                    <a:pt x="1402190" y="931874"/>
+                  </a:lnTo>
+                  <a:lnTo>
+                    <a:pt x="1442253" y="911663"/>
+                  </a:lnTo>
+                  <a:lnTo>
+                    <a:pt x="1482315" y="891333"/>
+                  </a:lnTo>
+                  <a:lnTo>
+                    <a:pt x="1522378" y="870897"/>
+                  </a:lnTo>
+                  <a:lnTo>
+                    <a:pt x="1562440" y="850364"/>
+                  </a:lnTo>
+                  <a:lnTo>
+                    <a:pt x="1602503" y="829744"/>
+                  </a:lnTo>
+                  <a:lnTo>
+                    <a:pt x="1642565" y="809046"/>
+                  </a:lnTo>
+                  <a:lnTo>
+                    <a:pt x="1682628" y="788277"/>
+                  </a:lnTo>
+                  <a:lnTo>
+                    <a:pt x="1722691" y="767444"/>
+                  </a:lnTo>
+                  <a:lnTo>
+                    <a:pt x="1762753" y="746554"/>
+                  </a:lnTo>
+                  <a:lnTo>
+                    <a:pt x="1802816" y="725611"/>
+                  </a:lnTo>
+                  <a:lnTo>
+                    <a:pt x="1842878" y="704621"/>
+                  </a:lnTo>
+                  <a:lnTo>
+                    <a:pt x="1882941" y="683587"/>
+                  </a:lnTo>
+                  <a:lnTo>
+                    <a:pt x="1923004" y="662514"/>
+                  </a:lnTo>
+                  <a:lnTo>
+                    <a:pt x="1963066" y="641406"/>
+                  </a:lnTo>
+                  <a:lnTo>
+                    <a:pt x="2003129" y="620264"/>
+                  </a:lnTo>
+                  <a:lnTo>
+                    <a:pt x="2043191" y="599093"/>
+                  </a:lnTo>
+                  <a:lnTo>
+                    <a:pt x="2083254" y="577894"/>
+                  </a:lnTo>
+                  <a:lnTo>
+                    <a:pt x="2123316" y="556670"/>
+                  </a:lnTo>
+                  <a:lnTo>
+                    <a:pt x="2163379" y="535423"/>
+                  </a:lnTo>
+                  <a:lnTo>
+                    <a:pt x="2203442" y="514154"/>
+                  </a:lnTo>
+                  <a:lnTo>
+                    <a:pt x="2243504" y="492866"/>
+                  </a:lnTo>
+                  <a:lnTo>
+                    <a:pt x="2283567" y="471559"/>
+                  </a:lnTo>
+                  <a:lnTo>
+                    <a:pt x="2323629" y="450235"/>
+                  </a:lnTo>
+                  <a:lnTo>
+                    <a:pt x="2363692" y="428896"/>
+                  </a:lnTo>
+                  <a:lnTo>
+                    <a:pt x="2403755" y="407542"/>
+                  </a:lnTo>
+                  <a:lnTo>
+                    <a:pt x="2443817" y="386174"/>
+                  </a:lnTo>
+                  <a:lnTo>
+                    <a:pt x="2483880" y="364794"/>
+                  </a:lnTo>
+                  <a:lnTo>
+                    <a:pt x="2523942" y="343402"/>
+                  </a:lnTo>
+                  <a:lnTo>
+                    <a:pt x="2564005" y="321999"/>
+                  </a:lnTo>
+                  <a:lnTo>
+                    <a:pt x="2604067" y="300585"/>
+                  </a:lnTo>
+                  <a:lnTo>
+                    <a:pt x="2644130" y="279162"/>
+                  </a:lnTo>
+                  <a:lnTo>
+                    <a:pt x="2684193" y="257730"/>
+                  </a:lnTo>
+                  <a:lnTo>
+                    <a:pt x="2724255" y="236289"/>
+                  </a:lnTo>
+                  <a:lnTo>
+                    <a:pt x="2764318" y="214840"/>
+                  </a:lnTo>
+                  <a:lnTo>
+                    <a:pt x="2804380" y="193384"/>
+                  </a:lnTo>
+                  <a:lnTo>
+                    <a:pt x="2844443" y="171920"/>
+                  </a:lnTo>
+                  <a:lnTo>
+                    <a:pt x="2884506" y="150450"/>
+                  </a:lnTo>
+                  <a:lnTo>
+                    <a:pt x="2924568" y="128974"/>
+                  </a:lnTo>
+                  <a:lnTo>
+                    <a:pt x="2964631" y="107491"/>
+                  </a:lnTo>
+                  <a:lnTo>
+                    <a:pt x="3004693" y="86003"/>
+                  </a:lnTo>
+                  <a:lnTo>
+                    <a:pt x="3044756" y="64509"/>
+                  </a:lnTo>
+                  <a:lnTo>
+                    <a:pt x="3084818" y="43011"/>
+                  </a:lnTo>
+                  <a:lnTo>
+                    <a:pt x="3124881" y="21507"/>
+                  </a:lnTo>
+                  <a:lnTo>
+                    <a:pt x="3164944" y="0"/>
+                  </a:lnTo>
+                  <a:lnTo>
+                    <a:pt x="3164944" y="448650"/>
+                  </a:lnTo>
+                  <a:lnTo>
+                    <a:pt x="3124881" y="462579"/>
+                  </a:lnTo>
+                  <a:lnTo>
+                    <a:pt x="3084818" y="476511"/>
+                  </a:lnTo>
+                  <a:lnTo>
+                    <a:pt x="3044756" y="490449"/>
+                  </a:lnTo>
+                  <a:lnTo>
+                    <a:pt x="3004693" y="504391"/>
+                  </a:lnTo>
+                  <a:lnTo>
+                    <a:pt x="2964631" y="518339"/>
+                  </a:lnTo>
+                  <a:lnTo>
+                    <a:pt x="2924568" y="532293"/>
+                  </a:lnTo>
+                  <a:lnTo>
+                    <a:pt x="2884506" y="546252"/>
+                  </a:lnTo>
+                  <a:lnTo>
+                    <a:pt x="2844443" y="560218"/>
+                  </a:lnTo>
+                  <a:lnTo>
+                    <a:pt x="2804380" y="574191"/>
+                  </a:lnTo>
+                  <a:lnTo>
+                    <a:pt x="2764318" y="588170"/>
+                  </a:lnTo>
+                  <a:lnTo>
+                    <a:pt x="2724255" y="602158"/>
+                  </a:lnTo>
+                  <a:lnTo>
+                    <a:pt x="2684193" y="616153"/>
+                  </a:lnTo>
+                  <a:lnTo>
+                    <a:pt x="2644130" y="630157"/>
+                  </a:lnTo>
+                  <a:lnTo>
+                    <a:pt x="2604067" y="644169"/>
+                  </a:lnTo>
+                  <a:lnTo>
+                    <a:pt x="2564005" y="658192"/>
+                  </a:lnTo>
+                  <a:lnTo>
+                    <a:pt x="2523942" y="672225"/>
+                  </a:lnTo>
+                  <a:lnTo>
+                    <a:pt x="2483880" y="686269"/>
+                  </a:lnTo>
+                  <a:lnTo>
+                    <a:pt x="2443817" y="700325"/>
+                  </a:lnTo>
+                  <a:lnTo>
+                    <a:pt x="2403755" y="714393"/>
+                  </a:lnTo>
+                  <a:lnTo>
+                    <a:pt x="2363692" y="728475"/>
+                  </a:lnTo>
+                  <a:lnTo>
+                    <a:pt x="2323629" y="742572"/>
+                  </a:lnTo>
+                  <a:lnTo>
+                    <a:pt x="2283567" y="756684"/>
+                  </a:lnTo>
+                  <a:lnTo>
+                    <a:pt x="2243504" y="770813"/>
+                  </a:lnTo>
+                  <a:lnTo>
+                    <a:pt x="2203442" y="784961"/>
+                  </a:lnTo>
+                  <a:lnTo>
+                    <a:pt x="2163379" y="799128"/>
+                  </a:lnTo>
+                  <a:lnTo>
+                    <a:pt x="2123316" y="813317"/>
+                  </a:lnTo>
+                  <a:lnTo>
+                    <a:pt x="2083254" y="827529"/>
+                  </a:lnTo>
+                  <a:lnTo>
+                    <a:pt x="2043191" y="841766"/>
+                  </a:lnTo>
+                  <a:lnTo>
+                    <a:pt x="2003129" y="856031"/>
+                  </a:lnTo>
+                  <a:lnTo>
+                    <a:pt x="1963066" y="870325"/>
+                  </a:lnTo>
+                  <a:lnTo>
+                    <a:pt x="1923004" y="884653"/>
+                  </a:lnTo>
+                  <a:lnTo>
+                    <a:pt x="1882941" y="899016"/>
+                  </a:lnTo>
+                  <a:lnTo>
+                    <a:pt x="1842878" y="913419"/>
+                  </a:lnTo>
+                  <a:lnTo>
+                    <a:pt x="1802816" y="927864"/>
+                  </a:lnTo>
+                  <a:lnTo>
+                    <a:pt x="1762753" y="942358"/>
+                  </a:lnTo>
+                  <a:lnTo>
+                    <a:pt x="1722691" y="956903"/>
+                  </a:lnTo>
+                  <a:lnTo>
+                    <a:pt x="1682628" y="971507"/>
+                  </a:lnTo>
+                  <a:lnTo>
+                    <a:pt x="1642565" y="986174"/>
+                  </a:lnTo>
+                  <a:lnTo>
+                    <a:pt x="1602503" y="1000912"/>
+                  </a:lnTo>
+                  <a:lnTo>
+                    <a:pt x="1562440" y="1015728"/>
+                  </a:lnTo>
+                  <a:lnTo>
+                    <a:pt x="1522378" y="1030631"/>
+                  </a:lnTo>
+                  <a:lnTo>
+                    <a:pt x="1482315" y="1045630"/>
+                  </a:lnTo>
+                  <a:lnTo>
+                    <a:pt x="1442253" y="1060737"/>
+                  </a:lnTo>
+                  <a:lnTo>
+                    <a:pt x="1402190" y="1075962"/>
+                  </a:lnTo>
+                  <a:lnTo>
+                    <a:pt x="1362127" y="1091318"/>
+                  </a:lnTo>
+                  <a:lnTo>
+                    <a:pt x="1322065" y="1106819"/>
+                  </a:lnTo>
+                  <a:lnTo>
+                    <a:pt x="1282002" y="1122481"/>
+                  </a:lnTo>
+                  <a:lnTo>
+                    <a:pt x="1241940" y="1138317"/>
+                  </a:lnTo>
+                  <a:lnTo>
+                    <a:pt x="1201877" y="1154345"/>
+                  </a:lnTo>
+                  <a:lnTo>
+                    <a:pt x="1161814" y="1170581"/>
+                  </a:lnTo>
+                  <a:lnTo>
+                    <a:pt x="1121752" y="1187039"/>
+                  </a:lnTo>
+                  <a:lnTo>
+                    <a:pt x="1081689" y="1203735"/>
+                  </a:lnTo>
+                  <a:lnTo>
+                    <a:pt x="1041627" y="1220681"/>
+                  </a:lnTo>
+                  <a:lnTo>
+                    <a:pt x="1001564" y="1237888"/>
+                  </a:lnTo>
+                  <a:lnTo>
+                    <a:pt x="961502" y="1255363"/>
+                  </a:lnTo>
+                  <a:lnTo>
+                    <a:pt x="921439" y="1273108"/>
+                  </a:lnTo>
+                  <a:lnTo>
+                    <a:pt x="881376" y="1291124"/>
+                  </a:lnTo>
+                  <a:lnTo>
+                    <a:pt x="841314" y="1309407"/>
+                  </a:lnTo>
+                  <a:lnTo>
+                    <a:pt x="801251" y="1327948"/>
+                  </a:lnTo>
+                  <a:lnTo>
+                    <a:pt x="761189" y="1346737"/>
+                  </a:lnTo>
+                  <a:lnTo>
+                    <a:pt x="721126" y="1365761"/>
+                  </a:lnTo>
+                  <a:lnTo>
+                    <a:pt x="681063" y="1385005"/>
+                  </a:lnTo>
+                  <a:lnTo>
+                    <a:pt x="641001" y="1404453"/>
+                  </a:lnTo>
+                  <a:lnTo>
+                    <a:pt x="600938" y="1424089"/>
+                  </a:lnTo>
+                  <a:lnTo>
+                    <a:pt x="560876" y="1443897"/>
+                  </a:lnTo>
+                  <a:lnTo>
+                    <a:pt x="520813" y="1463862"/>
+                  </a:lnTo>
+                  <a:lnTo>
+                    <a:pt x="480751" y="1483970"/>
+                  </a:lnTo>
+                  <a:lnTo>
+                    <a:pt x="440688" y="1504206"/>
+                  </a:lnTo>
+                  <a:lnTo>
+                    <a:pt x="400625" y="1524558"/>
+                  </a:lnTo>
+                  <a:lnTo>
+                    <a:pt x="360563" y="1545015"/>
+                  </a:lnTo>
+                  <a:lnTo>
+                    <a:pt x="320500" y="1565566"/>
+                  </a:lnTo>
+                  <a:lnTo>
+                    <a:pt x="280438" y="1586202"/>
+                  </a:lnTo>
+                  <a:lnTo>
+                    <a:pt x="240375" y="1606915"/>
+                  </a:lnTo>
+                  <a:lnTo>
+                    <a:pt x="200312" y="1627697"/>
+                  </a:lnTo>
+                  <a:lnTo>
+                    <a:pt x="160250" y="1648542"/>
+                  </a:lnTo>
+                  <a:lnTo>
+                    <a:pt x="120187" y="1669444"/>
+                  </a:lnTo>
+                  <a:lnTo>
+                    <a:pt x="80125" y="1690397"/>
+                  </a:lnTo>
+                  <a:lnTo>
+                    <a:pt x="40062" y="1711396"/>
+                  </a:lnTo>
+                  <a:lnTo>
+                    <a:pt x="0" y="1732438"/>
+                  </a:lnTo>
+                  <a:close/>
+                </a:path>
+              </a:pathLst>
+            </a:custGeom>
+            <a:solidFill>
+              <a:srgbClr val="E31A1C">
+                <a:alpha val="14901"/>
+              </a:srgbClr>
+            </a:solidFill>
+          </p:spPr>
+          <p:txBody>
+            <a:bodyPr/>
+            <a:lstStyle/>
+            <a:p/>
+          </p:txBody>
+        </p:sp>
+        <p:sp>
+          <p:nvSpPr>
+            <p:cNvPr id="971" name="pl971"/>
+            <p:cNvSpPr/>
+            <p:nvPr/>
+          </p:nvSpPr>
+          <p:spPr>
+            <a:xfrm>
+              <a:off x="2333112" y="3218704"/>
+              <a:ext cx="3164944" cy="1515659"/>
+            </a:xfrm>
+            <a:custGeom>
+              <a:avLst/>
+              <a:pathLst>
+                <a:path w="3164944" h="1515659">
+                  <a:moveTo>
+                    <a:pt x="0" y="1515659"/>
+                  </a:moveTo>
+                  <a:lnTo>
+                    <a:pt x="40062" y="1501265"/>
+                  </a:lnTo>
+                  <a:lnTo>
+                    <a:pt x="80125" y="1486828"/>
+                  </a:lnTo>
+                  <a:lnTo>
+                    <a:pt x="120187" y="1472345"/>
+                  </a:lnTo>
+                  <a:lnTo>
+                    <a:pt x="160250" y="1457811"/>
+                  </a:lnTo>
+                  <a:lnTo>
+                    <a:pt x="200312" y="1443220"/>
+                  </a:lnTo>
+                  <a:lnTo>
+                    <a:pt x="240375" y="1428566"/>
+                  </a:lnTo>
+                  <a:lnTo>
+                    <a:pt x="280438" y="1413843"/>
+                  </a:lnTo>
+                  <a:lnTo>
+                    <a:pt x="320500" y="1399043"/>
+                  </a:lnTo>
+                  <a:lnTo>
+                    <a:pt x="360563" y="1384158"/>
+                  </a:lnTo>
+                  <a:lnTo>
+                    <a:pt x="400625" y="1369179"/>
+                  </a:lnTo>
+                  <a:lnTo>
+                    <a:pt x="440688" y="1354095"/>
+                  </a:lnTo>
+                  <a:lnTo>
+                    <a:pt x="480751" y="1338895"/>
+                  </a:lnTo>
+                  <a:lnTo>
+                    <a:pt x="520813" y="1323566"/>
+                  </a:lnTo>
+                  <a:lnTo>
+                    <a:pt x="560876" y="1308095"/>
+                  </a:lnTo>
+                  <a:lnTo>
+                    <a:pt x="600938" y="1292468"/>
+                  </a:lnTo>
+                  <a:lnTo>
+                    <a:pt x="641001" y="1276668"/>
+                  </a:lnTo>
+                  <a:lnTo>
+                    <a:pt x="681063" y="1260680"/>
+                  </a:lnTo>
+                  <a:lnTo>
+                    <a:pt x="721126" y="1244488"/>
+                  </a:lnTo>
+                  <a:lnTo>
+                    <a:pt x="761189" y="1228076"/>
+                  </a:lnTo>
+                  <a:lnTo>
+                    <a:pt x="801251" y="1211429"/>
+                  </a:lnTo>
+                  <a:lnTo>
+                    <a:pt x="841314" y="1194534"/>
+                  </a:lnTo>
+                  <a:lnTo>
+                    <a:pt x="881376" y="1177380"/>
+                  </a:lnTo>
+                  <a:lnTo>
+                    <a:pt x="921439" y="1159960"/>
+                  </a:lnTo>
+                  <a:lnTo>
+                    <a:pt x="961502" y="1142270"/>
+                  </a:lnTo>
+                  <a:lnTo>
+                    <a:pt x="1001564" y="1124308"/>
+                  </a:lnTo>
+                  <a:lnTo>
+                    <a:pt x="1041627" y="1106079"/>
+                  </a:lnTo>
+                  <a:lnTo>
+                    <a:pt x="1081689" y="1087589"/>
+                  </a:lnTo>
+                  <a:lnTo>
+                    <a:pt x="1121752" y="1068849"/>
+                  </a:lnTo>
+                  <a:lnTo>
+                    <a:pt x="1161814" y="1049872"/>
+                  </a:lnTo>
+                  <a:lnTo>
+                    <a:pt x="1201877" y="1030671"/>
+                  </a:lnTo>
+                  <a:lnTo>
+                    <a:pt x="1241940" y="1011263"/>
+                  </a:lnTo>
+                  <a:lnTo>
+                    <a:pt x="1282002" y="991663"/>
+                  </a:lnTo>
+                  <a:lnTo>
+                    <a:pt x="1322065" y="971888"/>
+                  </a:lnTo>
+                  <a:lnTo>
+                    <a:pt x="1362127" y="951954"/>
+                  </a:lnTo>
+                  <a:lnTo>
+                    <a:pt x="1402190" y="931874"/>
+                  </a:lnTo>
+                  <a:lnTo>
+                    <a:pt x="1442253" y="911663"/>
+                  </a:lnTo>
+                  <a:lnTo>
+                    <a:pt x="1482315" y="891333"/>
+                  </a:lnTo>
+                  <a:lnTo>
+                    <a:pt x="1522378" y="870897"/>
+                  </a:lnTo>
+                  <a:lnTo>
+                    <a:pt x="1562440" y="850364"/>
+                  </a:lnTo>
+                  <a:lnTo>
+                    <a:pt x="1602503" y="829744"/>
+                  </a:lnTo>
+                  <a:lnTo>
+                    <a:pt x="1642565" y="809046"/>
+                  </a:lnTo>
+                  <a:lnTo>
+                    <a:pt x="1682628" y="788277"/>
+                  </a:lnTo>
+                  <a:lnTo>
+                    <a:pt x="1722691" y="767444"/>
+                  </a:lnTo>
+                  <a:lnTo>
+                    <a:pt x="1762753" y="746554"/>
+                  </a:lnTo>
+                  <a:lnTo>
+                    <a:pt x="1802816" y="725611"/>
+                  </a:lnTo>
+                  <a:lnTo>
+                    <a:pt x="1842878" y="704621"/>
+                  </a:lnTo>
+                  <a:lnTo>
+                    <a:pt x="1882941" y="683587"/>
+                  </a:lnTo>
+                  <a:lnTo>
+                    <a:pt x="1923004" y="662514"/>
+                  </a:lnTo>
+                  <a:lnTo>
+                    <a:pt x="1963066" y="641406"/>
+                  </a:lnTo>
+                  <a:lnTo>
+                    <a:pt x="2003129" y="620264"/>
+                  </a:lnTo>
+                  <a:lnTo>
+                    <a:pt x="2043191" y="599093"/>
+                  </a:lnTo>
+                  <a:lnTo>
+                    <a:pt x="2083254" y="577894"/>
+                  </a:lnTo>
+                  <a:lnTo>
+                    <a:pt x="2123316" y="556670"/>
+                  </a:lnTo>
+                  <a:lnTo>
+                    <a:pt x="2163379" y="535423"/>
+                  </a:lnTo>
+                  <a:lnTo>
+                    <a:pt x="2203442" y="514154"/>
+                  </a:lnTo>
+                  <a:lnTo>
+                    <a:pt x="2243504" y="492866"/>
+                  </a:lnTo>
+                  <a:lnTo>
+                    <a:pt x="2283567" y="471559"/>
+                  </a:lnTo>
+                  <a:lnTo>
+                    <a:pt x="2323629" y="450235"/>
+                  </a:lnTo>
+                  <a:lnTo>
+                    <a:pt x="2363692" y="428896"/>
+                  </a:lnTo>
+                  <a:lnTo>
+                    <a:pt x="2403755" y="407542"/>
+                  </a:lnTo>
+                  <a:lnTo>
+                    <a:pt x="2443817" y="386174"/>
+                  </a:lnTo>
+                  <a:lnTo>
+                    <a:pt x="2483880" y="364794"/>
+                  </a:lnTo>
+                  <a:lnTo>
+                    <a:pt x="2523942" y="343402"/>
+                  </a:lnTo>
+                  <a:lnTo>
+                    <a:pt x="2564005" y="321999"/>
+                  </a:lnTo>
+                  <a:lnTo>
+                    <a:pt x="2604067" y="300585"/>
+                  </a:lnTo>
+                  <a:lnTo>
+                    <a:pt x="2644130" y="279162"/>
+                  </a:lnTo>
+                  <a:lnTo>
+                    <a:pt x="2684193" y="257730"/>
+                  </a:lnTo>
+                  <a:lnTo>
+                    <a:pt x="2724255" y="236289"/>
+                  </a:lnTo>
+                  <a:lnTo>
+                    <a:pt x="2764318" y="214840"/>
+                  </a:lnTo>
+                  <a:lnTo>
+                    <a:pt x="2804380" y="193384"/>
+                  </a:lnTo>
+                  <a:lnTo>
+                    <a:pt x="2844443" y="171920"/>
+                  </a:lnTo>
+                  <a:lnTo>
+                    <a:pt x="2884506" y="150450"/>
+                  </a:lnTo>
+                  <a:lnTo>
+                    <a:pt x="2924568" y="128974"/>
+                  </a:lnTo>
+                  <a:lnTo>
+                    <a:pt x="2964631" y="107491"/>
+                  </a:lnTo>
+                  <a:lnTo>
+                    <a:pt x="3004693" y="86003"/>
+                  </a:lnTo>
+                  <a:lnTo>
+                    <a:pt x="3044756" y="64509"/>
+                  </a:lnTo>
+                  <a:lnTo>
+                    <a:pt x="3084818" y="43011"/>
+                  </a:lnTo>
+                  <a:lnTo>
+                    <a:pt x="3124881" y="21507"/>
+                  </a:lnTo>
+                  <a:lnTo>
+                    <a:pt x="3164944" y="0"/>
+                  </a:lnTo>
+                </a:path>
+              </a:pathLst>
+            </a:custGeom>
+          </p:spPr>
+          <p:txBody>
+            <a:bodyPr/>
+            <a:lstStyle/>
+            <a:p/>
+          </p:txBody>
+        </p:sp>
+        <p:sp>
+          <p:nvSpPr>
+            <p:cNvPr id="972" name="pl972"/>
+            <p:cNvSpPr/>
+            <p:nvPr/>
+          </p:nvSpPr>
+          <p:spPr>
+            <a:xfrm>
+              <a:off x="2333112" y="3667355"/>
+              <a:ext cx="3164944" cy="1283787"/>
+            </a:xfrm>
+            <a:custGeom>
+              <a:avLst/>
+              <a:pathLst>
+                <a:path w="3164944" h="1283787">
+                  <a:moveTo>
+                    <a:pt x="3164944" y="0"/>
+                  </a:moveTo>
+                  <a:lnTo>
+                    <a:pt x="3124881" y="13928"/>
+                  </a:lnTo>
+                  <a:lnTo>
+                    <a:pt x="3084818" y="27860"/>
+                  </a:lnTo>
+                  <a:lnTo>
+                    <a:pt x="3044756" y="41798"/>
+                  </a:lnTo>
+                  <a:lnTo>
+                    <a:pt x="3004693" y="55740"/>
+                  </a:lnTo>
+                  <a:lnTo>
+                    <a:pt x="2964631" y="69688"/>
+                  </a:lnTo>
+                  <a:lnTo>
+                    <a:pt x="2924568" y="83642"/>
+                  </a:lnTo>
+                  <a:lnTo>
+                    <a:pt x="2884506" y="97601"/>
+                  </a:lnTo>
+                  <a:lnTo>
+                    <a:pt x="2844443" y="111567"/>
+                  </a:lnTo>
+                  <a:lnTo>
+                    <a:pt x="2804380" y="125540"/>
+                  </a:lnTo>
+                  <a:lnTo>
+                    <a:pt x="2764318" y="139519"/>
+                  </a:lnTo>
+                  <a:lnTo>
+                    <a:pt x="2724255" y="153507"/>
+                  </a:lnTo>
+                  <a:lnTo>
+                    <a:pt x="2684193" y="167502"/>
+                  </a:lnTo>
+                  <a:lnTo>
+                    <a:pt x="2644130" y="181506"/>
+                  </a:lnTo>
+                  <a:lnTo>
+                    <a:pt x="2604067" y="195518"/>
+                  </a:lnTo>
+                  <a:lnTo>
+                    <a:pt x="2564005" y="209541"/>
+                  </a:lnTo>
+                  <a:lnTo>
+                    <a:pt x="2523942" y="223574"/>
+                  </a:lnTo>
+                  <a:lnTo>
+                    <a:pt x="2483880" y="237618"/>
+                  </a:lnTo>
+                  <a:lnTo>
+                    <a:pt x="2443817" y="251674"/>
+                  </a:lnTo>
+                  <a:lnTo>
+                    <a:pt x="2403755" y="265742"/>
+                  </a:lnTo>
+                  <a:lnTo>
+                    <a:pt x="2363692" y="279824"/>
+                  </a:lnTo>
+                  <a:lnTo>
+                    <a:pt x="2323629" y="293921"/>
+                  </a:lnTo>
+                  <a:lnTo>
+                    <a:pt x="2283567" y="308033"/>
+                  </a:lnTo>
+                  <a:lnTo>
+                    <a:pt x="2243504" y="322162"/>
+                  </a:lnTo>
+                  <a:lnTo>
+                    <a:pt x="2203442" y="336310"/>
+                  </a:lnTo>
+                  <a:lnTo>
+                    <a:pt x="2163379" y="350477"/>
+                  </a:lnTo>
+                  <a:lnTo>
+                    <a:pt x="2123316" y="364666"/>
+                  </a:lnTo>
+                  <a:lnTo>
+                    <a:pt x="2083254" y="378878"/>
+                  </a:lnTo>
+                  <a:lnTo>
+                    <a:pt x="2043191" y="393115"/>
+                  </a:lnTo>
+                  <a:lnTo>
+                    <a:pt x="2003129" y="407380"/>
+                  </a:lnTo>
+                  <a:lnTo>
+                    <a:pt x="1963066" y="421674"/>
+                  </a:lnTo>
+                  <a:lnTo>
+                    <a:pt x="1923004" y="436002"/>
+                  </a:lnTo>
+                  <a:lnTo>
+                    <a:pt x="1882941" y="450365"/>
+                  </a:lnTo>
+                  <a:lnTo>
+                    <a:pt x="1842878" y="464768"/>
+                  </a:lnTo>
+                  <a:lnTo>
+                    <a:pt x="1802816" y="479213"/>
+                  </a:lnTo>
+                  <a:lnTo>
+                    <a:pt x="1762753" y="493707"/>
+                  </a:lnTo>
+                  <a:lnTo>
+                    <a:pt x="1722691" y="508252"/>
+                  </a:lnTo>
+                  <a:lnTo>
+                    <a:pt x="1682628" y="522856"/>
+                  </a:lnTo>
+                  <a:lnTo>
+                    <a:pt x="1642565" y="537523"/>
+                  </a:lnTo>
+                  <a:lnTo>
+                    <a:pt x="1602503" y="552261"/>
+                  </a:lnTo>
+                  <a:lnTo>
+                    <a:pt x="1562440" y="567077"/>
+                  </a:lnTo>
+                  <a:lnTo>
+                    <a:pt x="1522378" y="581980"/>
+                  </a:lnTo>
+                  <a:lnTo>
+                    <a:pt x="1482315" y="596979"/>
+                  </a:lnTo>
+                  <a:lnTo>
+                    <a:pt x="1442253" y="612086"/>
+                  </a:lnTo>
+                  <a:lnTo>
+                    <a:pt x="1402190" y="627311"/>
+                  </a:lnTo>
+                  <a:lnTo>
+                    <a:pt x="1362127" y="642667"/>
+                  </a:lnTo>
+                  <a:lnTo>
+                    <a:pt x="1322065" y="658168"/>
+                  </a:lnTo>
+                  <a:lnTo>
+                    <a:pt x="1282002" y="673830"/>
+                  </a:lnTo>
+                  <a:lnTo>
+                    <a:pt x="1241940" y="689666"/>
+                  </a:lnTo>
+                  <a:lnTo>
+                    <a:pt x="1201877" y="705694"/>
+                  </a:lnTo>
+                  <a:lnTo>
+                    <a:pt x="1161814" y="721930"/>
+                  </a:lnTo>
+                  <a:lnTo>
+                    <a:pt x="1121752" y="738388"/>
+                  </a:lnTo>
+                  <a:lnTo>
+                    <a:pt x="1081689" y="755084"/>
+                  </a:lnTo>
+                  <a:lnTo>
+                    <a:pt x="1041627" y="772030"/>
+                  </a:lnTo>
+                  <a:lnTo>
+                    <a:pt x="1001564" y="789237"/>
+                  </a:lnTo>
+                  <a:lnTo>
+                    <a:pt x="961502" y="806712"/>
+                  </a:lnTo>
+                  <a:lnTo>
+                    <a:pt x="921439" y="824457"/>
+                  </a:lnTo>
+                  <a:lnTo>
+                    <a:pt x="881376" y="842473"/>
+                  </a:lnTo>
+                  <a:lnTo>
+                    <a:pt x="841314" y="860756"/>
+                  </a:lnTo>
+                  <a:lnTo>
+                    <a:pt x="801251" y="879297"/>
+                  </a:lnTo>
+                  <a:lnTo>
+                    <a:pt x="761189" y="898086"/>
+                  </a:lnTo>
+                  <a:lnTo>
+                    <a:pt x="721126" y="917110"/>
+                  </a:lnTo>
+                  <a:lnTo>
+                    <a:pt x="681063" y="936354"/>
+                  </a:lnTo>
+                  <a:lnTo>
+                    <a:pt x="641001" y="955802"/>
+                  </a:lnTo>
+                  <a:lnTo>
+                    <a:pt x="600938" y="975438"/>
+                  </a:lnTo>
+                  <a:lnTo>
+                    <a:pt x="560876" y="995246"/>
+                  </a:lnTo>
+                  <a:lnTo>
+                    <a:pt x="520813" y="1015211"/>
+                  </a:lnTo>
+                  <a:lnTo>
+                    <a:pt x="480751" y="1035319"/>
+                  </a:lnTo>
+                  <a:lnTo>
+                    <a:pt x="440688" y="1055555"/>
+                  </a:lnTo>
+                  <a:lnTo>
+                    <a:pt x="400625" y="1075907"/>
+                  </a:lnTo>
+                  <a:lnTo>
+                    <a:pt x="360563" y="1096364"/>
+                  </a:lnTo>
+                  <a:lnTo>
+                    <a:pt x="320500" y="1116915"/>
+                  </a:lnTo>
+                  <a:lnTo>
+                    <a:pt x="280438" y="1137551"/>
+                  </a:lnTo>
+                  <a:lnTo>
+                    <a:pt x="240375" y="1158264"/>
+                  </a:lnTo>
+                  <a:lnTo>
+                    <a:pt x="200312" y="1179046"/>
+                  </a:lnTo>
+                  <a:lnTo>
+                    <a:pt x="160250" y="1199891"/>
+                  </a:lnTo>
+                  <a:lnTo>
+                    <a:pt x="120187" y="1220793"/>
+                  </a:lnTo>
+                  <a:lnTo>
+                    <a:pt x="80125" y="1241746"/>
+                  </a:lnTo>
+                  <a:lnTo>
+                    <a:pt x="40062" y="1262745"/>
+                  </a:lnTo>
+                  <a:lnTo>
+                    <a:pt x="0" y="1283787"/>
+                  </a:lnTo>
+                </a:path>
+              </a:pathLst>
+            </a:custGeom>
+          </p:spPr>
+          <p:txBody>
+            <a:bodyPr/>
+            <a:lstStyle/>
+            <a:p/>
+          </p:txBody>
+        </p:sp>
+        <p:sp>
+          <p:nvSpPr>
+            <p:cNvPr id="973" name="pl973"/>
+            <p:cNvSpPr/>
+            <p:nvPr/>
+          </p:nvSpPr>
+          <p:spPr>
+            <a:xfrm>
+              <a:off x="2333112" y="3443029"/>
+              <a:ext cx="3164944" cy="1399723"/>
+            </a:xfrm>
+            <a:custGeom>
+              <a:avLst/>
+              <a:pathLst>
+                <a:path w="3164944" h="1399723">
+                  <a:moveTo>
+                    <a:pt x="0" y="1399723"/>
+                  </a:moveTo>
+                  <a:lnTo>
+                    <a:pt x="40062" y="1382005"/>
+                  </a:lnTo>
+                  <a:lnTo>
+                    <a:pt x="80125" y="1364287"/>
+                  </a:lnTo>
+                  <a:lnTo>
+                    <a:pt x="120187" y="1346569"/>
+                  </a:lnTo>
+                  <a:lnTo>
+                    <a:pt x="160250" y="1328851"/>
+                  </a:lnTo>
+                  <a:lnTo>
+                    <a:pt x="200312" y="1311133"/>
+                  </a:lnTo>
+                  <a:lnTo>
+                    <a:pt x="240375" y="1293415"/>
+                  </a:lnTo>
+                  <a:lnTo>
+                    <a:pt x="280438" y="1275697"/>
+                  </a:lnTo>
+                  <a:lnTo>
+                    <a:pt x="320500" y="1257979"/>
+                  </a:lnTo>
+                  <a:lnTo>
+                    <a:pt x="360563" y="1240261"/>
+                  </a:lnTo>
+                  <a:lnTo>
+                    <a:pt x="400625" y="1222543"/>
+                  </a:lnTo>
+                  <a:lnTo>
+                    <a:pt x="440688" y="1204825"/>
+                  </a:lnTo>
+                  <a:lnTo>
+                    <a:pt x="480751" y="1187107"/>
+                  </a:lnTo>
+                  <a:lnTo>
+                    <a:pt x="520813" y="1169389"/>
+                  </a:lnTo>
+                  <a:lnTo>
+                    <a:pt x="560876" y="1151671"/>
+                  </a:lnTo>
+                  <a:lnTo>
+                    <a:pt x="600938" y="1133953"/>
+                  </a:lnTo>
+                  <a:lnTo>
+                    <a:pt x="641001" y="1116235"/>
+                  </a:lnTo>
+                  <a:lnTo>
+                    <a:pt x="681063" y="1098517"/>
+                  </a:lnTo>
+                  <a:lnTo>
+                    <a:pt x="721126" y="1080799"/>
+                  </a:lnTo>
+                  <a:lnTo>
+                    <a:pt x="761189" y="1063081"/>
+                  </a:lnTo>
+                  <a:lnTo>
+                    <a:pt x="801251" y="1045363"/>
+                  </a:lnTo>
+                  <a:lnTo>
+                    <a:pt x="841314" y="1027645"/>
+                  </a:lnTo>
+                  <a:lnTo>
+                    <a:pt x="881376" y="1009927"/>
+                  </a:lnTo>
+                  <a:lnTo>
+                    <a:pt x="921439" y="992209"/>
+                  </a:lnTo>
+                  <a:lnTo>
+                    <a:pt x="961502" y="974491"/>
+                  </a:lnTo>
+                  <a:lnTo>
+                    <a:pt x="1001564" y="956773"/>
+                  </a:lnTo>
+                  <a:lnTo>
+                    <a:pt x="1041627" y="939055"/>
+                  </a:lnTo>
+                  <a:lnTo>
+                    <a:pt x="1081689" y="921337"/>
+                  </a:lnTo>
+                  <a:lnTo>
+                    <a:pt x="1121752" y="903619"/>
+                  </a:lnTo>
+                  <a:lnTo>
+                    <a:pt x="1161814" y="885901"/>
+                  </a:lnTo>
+                  <a:lnTo>
+                    <a:pt x="1201877" y="868182"/>
+                  </a:lnTo>
+                  <a:lnTo>
+                    <a:pt x="1241940" y="850464"/>
+                  </a:lnTo>
+                  <a:lnTo>
+                    <a:pt x="1282002" y="832746"/>
+                  </a:lnTo>
+                  <a:lnTo>
+                    <a:pt x="1322065" y="815028"/>
+                  </a:lnTo>
+                  <a:lnTo>
+                    <a:pt x="1362127" y="797310"/>
+                  </a:lnTo>
+                  <a:lnTo>
+                    <a:pt x="1402190" y="779592"/>
+                  </a:lnTo>
+                  <a:lnTo>
+                    <a:pt x="1442253" y="761874"/>
+                  </a:lnTo>
+                  <a:lnTo>
+                    <a:pt x="1482315" y="744156"/>
+                  </a:lnTo>
+                  <a:lnTo>
+                    <a:pt x="1522378" y="726438"/>
+                  </a:lnTo>
+                  <a:lnTo>
+                    <a:pt x="1562440" y="708720"/>
+                  </a:lnTo>
+                  <a:lnTo>
+                    <a:pt x="1602503" y="691002"/>
+                  </a:lnTo>
+                  <a:lnTo>
+                    <a:pt x="1642565" y="673284"/>
+                  </a:lnTo>
+                  <a:lnTo>
+                    <a:pt x="1682628" y="655566"/>
+                  </a:lnTo>
+                  <a:lnTo>
+                    <a:pt x="1722691" y="637848"/>
+                  </a:lnTo>
+                  <a:lnTo>
+                    <a:pt x="1762753" y="620130"/>
+                  </a:lnTo>
+                  <a:lnTo>
+                    <a:pt x="1802816" y="602412"/>
+                  </a:lnTo>
+                  <a:lnTo>
+                    <a:pt x="1842878" y="584694"/>
+                  </a:lnTo>
+                  <a:lnTo>
+                    <a:pt x="1882941" y="566976"/>
+                  </a:lnTo>
+                  <a:lnTo>
+                    <a:pt x="1923004" y="549258"/>
+                  </a:lnTo>
+                  <a:lnTo>
+                    <a:pt x="1963066" y="531540"/>
+                  </a:lnTo>
+                  <a:lnTo>
+                    <a:pt x="2003129" y="513822"/>
+                  </a:lnTo>
+                  <a:lnTo>
+                    <a:pt x="2043191" y="496104"/>
+                  </a:lnTo>
+                  <a:lnTo>
+                    <a:pt x="2083254" y="478386"/>
+                  </a:lnTo>
+                  <a:lnTo>
+                    <a:pt x="2123316" y="460668"/>
+                  </a:lnTo>
+                  <a:lnTo>
+                    <a:pt x="2163379" y="442950"/>
+                  </a:lnTo>
+                  <a:lnTo>
+                    <a:pt x="2203442" y="425232"/>
+                  </a:lnTo>
+                  <a:lnTo>
+                    <a:pt x="2243504" y="407514"/>
+                  </a:lnTo>
+                  <a:lnTo>
+                    <a:pt x="2283567" y="389796"/>
+                  </a:lnTo>
+                  <a:lnTo>
+                    <a:pt x="2323629" y="372078"/>
+                  </a:lnTo>
+                  <a:lnTo>
+                    <a:pt x="2363692" y="354360"/>
+                  </a:lnTo>
+                  <a:lnTo>
+                    <a:pt x="2403755" y="336642"/>
+                  </a:lnTo>
+                  <a:lnTo>
+                    <a:pt x="2443817" y="318924"/>
+                  </a:lnTo>
+                  <a:lnTo>
+                    <a:pt x="2483880" y="301206"/>
+                  </a:lnTo>
+                  <a:lnTo>
+                    <a:pt x="2523942" y="283488"/>
+                  </a:lnTo>
+                  <a:lnTo>
+                    <a:pt x="2564005" y="265770"/>
+                  </a:lnTo>
+                  <a:lnTo>
+                    <a:pt x="2604067" y="248052"/>
+                  </a:lnTo>
+                  <a:lnTo>
+                    <a:pt x="2644130" y="230334"/>
+                  </a:lnTo>
+                  <a:lnTo>
+                    <a:pt x="2684193" y="212616"/>
+                  </a:lnTo>
+                  <a:lnTo>
+                    <a:pt x="2724255" y="194898"/>
+                  </a:lnTo>
+                  <a:lnTo>
+                    <a:pt x="2764318" y="177180"/>
+                  </a:lnTo>
+                  <a:lnTo>
+                    <a:pt x="2804380" y="159462"/>
+                  </a:lnTo>
+                  <a:lnTo>
+                    <a:pt x="2844443" y="141744"/>
+                  </a:lnTo>
+                  <a:lnTo>
+                    <a:pt x="2884506" y="124026"/>
+                  </a:lnTo>
+                  <a:lnTo>
+                    <a:pt x="2924568" y="106308"/>
+                  </a:lnTo>
+                  <a:lnTo>
+                    <a:pt x="2964631" y="88590"/>
+                  </a:lnTo>
+                  <a:lnTo>
+                    <a:pt x="3004693" y="70872"/>
+                  </a:lnTo>
+                  <a:lnTo>
+                    <a:pt x="3044756" y="53154"/>
+                  </a:lnTo>
+                  <a:lnTo>
+                    <a:pt x="3084818" y="35436"/>
+                  </a:lnTo>
+                  <a:lnTo>
+                    <a:pt x="3124881" y="17718"/>
+                  </a:lnTo>
+                  <a:lnTo>
+                    <a:pt x="3164944" y="0"/>
+                  </a:lnTo>
+                </a:path>
+              </a:pathLst>
+            </a:custGeom>
+            <a:ln w="27101" cap="flat">
+              <a:solidFill>
+                <a:srgbClr val="E31A1C">
+                  <a:alpha val="100000"/>
+                </a:srgbClr>
+              </a:solidFill>
+              <a:prstDash val="solid"/>
+              <a:round/>
+            </a:ln>
+          </p:spPr>
+          <p:txBody>
+            <a:bodyPr/>
+            <a:lstStyle/>
+            <a:p/>
+          </p:txBody>
+        </p:sp>
+        <p:sp>
+          <p:nvSpPr>
+            <p:cNvPr id="974" name="tx974"/>
             <p:cNvSpPr/>
             <p:nvPr/>
           </p:nvSpPr>
@@ -36130,7 +38190,7 @@
         </p:sp>
         <p:sp>
           <p:nvSpPr>
-            <p:cNvPr id="967" name="tx967"/>
+            <p:cNvPr id="975" name="tx975"/>
             <p:cNvSpPr/>
             <p:nvPr/>
           </p:nvSpPr>
@@ -36176,7 +38236,7 @@
         </p:sp>
         <p:sp>
           <p:nvSpPr>
-            <p:cNvPr id="968" name="tx968"/>
+            <p:cNvPr id="976" name="tx976"/>
             <p:cNvSpPr/>
             <p:nvPr/>
           </p:nvSpPr>
@@ -36222,7 +38282,7 @@
         </p:sp>
         <p:sp>
           <p:nvSpPr>
-            <p:cNvPr id="969" name="tx969"/>
+            <p:cNvPr id="977" name="tx977"/>
             <p:cNvSpPr/>
             <p:nvPr/>
           </p:nvSpPr>
@@ -36268,7 +38328,7 @@
         </p:sp>
         <p:sp>
           <p:nvSpPr>
-            <p:cNvPr id="970" name="tx970"/>
+            <p:cNvPr id="978" name="tx978"/>
             <p:cNvSpPr/>
             <p:nvPr/>
           </p:nvSpPr>
@@ -36314,7 +38374,7 @@
         </p:sp>
         <p:sp>
           <p:nvSpPr>
-            <p:cNvPr id="971" name="tx971"/>
+            <p:cNvPr id="979" name="tx979"/>
             <p:cNvSpPr/>
             <p:nvPr/>
           </p:nvSpPr>
@@ -36360,7 +38420,7 @@
         </p:sp>
         <p:sp>
           <p:nvSpPr>
-            <p:cNvPr id="972" name="tx972"/>
+            <p:cNvPr id="980" name="tx980"/>
             <p:cNvSpPr/>
             <p:nvPr/>
           </p:nvSpPr>
@@ -36406,7 +38466,7 @@
         </p:sp>
         <p:sp>
           <p:nvSpPr>
-            <p:cNvPr id="973" name="tx973"/>
+            <p:cNvPr id="981" name="tx981"/>
             <p:cNvSpPr/>
             <p:nvPr/>
           </p:nvSpPr>
@@ -36452,7 +38512,7 @@
         </p:sp>
         <p:sp>
           <p:nvSpPr>
-            <p:cNvPr id="974" name="tx974"/>
+            <p:cNvPr id="982" name="tx982"/>
             <p:cNvSpPr/>
             <p:nvPr/>
           </p:nvSpPr>
@@ -36498,7 +38558,7 @@
         </p:sp>
         <p:sp>
           <p:nvSpPr>
-            <p:cNvPr id="975" name="tx975"/>
+            <p:cNvPr id="983" name="tx983"/>
             <p:cNvSpPr/>
             <p:nvPr/>
           </p:nvSpPr>
@@ -36544,7 +38604,7 @@
         </p:sp>
         <p:sp>
           <p:nvSpPr>
-            <p:cNvPr id="976" name="tx976"/>
+            <p:cNvPr id="984" name="tx984"/>
             <p:cNvSpPr/>
             <p:nvPr/>
           </p:nvSpPr>
@@ -36590,7 +38650,7 @@
         </p:sp>
         <p:sp>
           <p:nvSpPr>
-            <p:cNvPr id="977" name="tx977"/>
+            <p:cNvPr id="985" name="tx985"/>
             <p:cNvSpPr/>
             <p:nvPr/>
           </p:nvSpPr>
@@ -36636,7 +38696,7 @@
         </p:sp>
         <p:sp>
           <p:nvSpPr>
-            <p:cNvPr id="978" name="tx978"/>
+            <p:cNvPr id="986" name="tx986"/>
             <p:cNvSpPr/>
             <p:nvPr/>
           </p:nvSpPr>
